--- a/Domingo-14/S01_Domingo-14_3_Story_Caja-de-preguntas_9x16.pptx
+++ b/Domingo-14/S01_Domingo-14_3_Story_Caja-de-preguntas_9x16.pptx
@@ -3285,7 +3285,7 @@
         </p:nvSpPr>
         <p:spPr>
           <a:xfrm>
-            <a:off x="777240" y="1456436"/>
+            <a:off x="777240" y="2345436"/>
             <a:ext cx="1371600" cy="146304"/>
           </a:xfrm>
           <a:prstGeom prst="rect">
@@ -3329,8 +3329,8 @@
         </p:nvSpPr>
         <p:spPr>
           <a:xfrm>
-            <a:off x="777240" y="1913636"/>
-            <a:ext cx="6675120" cy="10071608"/>
+            <a:off x="777240" y="2802636"/>
+            <a:ext cx="6675120" cy="8293608"/>
           </a:xfrm>
           <a:prstGeom prst="rect">
             <a:avLst/>
@@ -3349,7 +3349,7 @@
               </a:lnSpc>
             </a:pPr>
             <a:r>
-              <a:rPr sz="8800" b="1">
+              <a:rPr sz="8400" b="1">
                 <a:solidFill>
                   <a:srgbClr val="FFFFFF"/>
                 </a:solidFill>
@@ -3368,8 +3368,8 @@
         </p:nvSpPr>
         <p:spPr>
           <a:xfrm>
-            <a:off x="777240" y="11985244"/>
-            <a:ext cx="6675120" cy="1118108"/>
+            <a:off x="777240" y="11096244"/>
+            <a:ext cx="6675120" cy="1530858"/>
           </a:xfrm>
           <a:prstGeom prst="rect">
             <a:avLst/>
@@ -3394,7 +3394,7 @@
                 </a:solidFill>
                 <a:latin typeface="Inter"/>
               </a:rPr>
-              <a:t>Pregúntanos.</a:t>
+              <a:t>Pregúntanos. Y pruébalo en notaly.com.ve</a:t>
             </a:r>
           </a:p>
         </p:txBody>

--- a/Domingo-14/S01_Domingo-14_3_Story_Caja-de-preguntas_9x16.pptx
+++ b/Domingo-14/S01_Domingo-14_3_Story_Caja-de-preguntas_9x16.pptx
@@ -3394,7 +3394,7 @@
                 </a:solidFill>
                 <a:latin typeface="Inter"/>
               </a:rPr>
-              <a:t>Pregúntanos. Y pruébalo en notaly.com.ve</a:t>
+              <a:t>Pregúntanos. Y conócenos en notaly.com.ve</a:t>
             </a:r>
           </a:p>
         </p:txBody>

--- a/Domingo-14/S01_Domingo-14_3_Story_Caja-de-preguntas_9x16.pptx
+++ b/Domingo-14/S01_Domingo-14_3_Story_Caja-de-preguntas_9x16.pptx
@@ -3098,7 +3098,7 @@
       <p:grpSpPr/>
       <p:pic>
         <p:nvPicPr>
-          <p:cNvPr id="2" name="Picture 1" descr="oficina.png"/>
+          <p:cNvPr id="2" name="Picture 1" descr="textura.png"/>
           <p:cNvPicPr>
             <a:picLocks noChangeAspect="1"/>
           </p:cNvPicPr>
@@ -3112,8 +3112,8 @@
         </p:blipFill>
         <p:spPr>
           <a:xfrm>
-            <a:off x="-1371600" y="0"/>
-            <a:ext cx="10972800" cy="14630400"/>
+            <a:off x="-1347216" y="0"/>
+            <a:ext cx="10924032" cy="14630400"/>
           </a:xfrm>
           <a:prstGeom prst="rect">
             <a:avLst/>
